--- a/~sasano/lecture/fpl/26/fpl11.pptx
+++ b/~sasano/lecture/fpl/26/fpl11.pptx
@@ -325,7 +325,7 @@
           <a:p>
             <a:fld id="{01AC0B91-4105-FC41-AF23-562AED5B73ED}" type="datetimeFigureOut">
               <a:rPr kumimoji="1" lang="ja-JP" altLang="en-US" smtClean="0"/>
-              <a:t>2026/1/16</a:t>
+              <a:t>2026/9/30</a:t>
             </a:fld>
             <a:endParaRPr kumimoji="1" lang="ja-JP" altLang="en-US"/>
           </a:p>
@@ -525,7 +525,7 @@
           <a:p>
             <a:fld id="{01AC0B91-4105-FC41-AF23-562AED5B73ED}" type="datetimeFigureOut">
               <a:rPr kumimoji="1" lang="ja-JP" altLang="en-US" smtClean="0"/>
-              <a:t>2026/1/16</a:t>
+              <a:t>2026/9/30</a:t>
             </a:fld>
             <a:endParaRPr kumimoji="1" lang="ja-JP" altLang="en-US"/>
           </a:p>
@@ -735,7 +735,7 @@
           <a:p>
             <a:fld id="{01AC0B91-4105-FC41-AF23-562AED5B73ED}" type="datetimeFigureOut">
               <a:rPr kumimoji="1" lang="ja-JP" altLang="en-US" smtClean="0"/>
-              <a:t>2026/1/16</a:t>
+              <a:t>2026/9/30</a:t>
             </a:fld>
             <a:endParaRPr kumimoji="1" lang="ja-JP" altLang="en-US"/>
           </a:p>
@@ -935,7 +935,7 @@
           <a:p>
             <a:fld id="{01AC0B91-4105-FC41-AF23-562AED5B73ED}" type="datetimeFigureOut">
               <a:rPr kumimoji="1" lang="ja-JP" altLang="en-US" smtClean="0"/>
-              <a:t>2026/1/16</a:t>
+              <a:t>2026/9/30</a:t>
             </a:fld>
             <a:endParaRPr kumimoji="1" lang="ja-JP" altLang="en-US"/>
           </a:p>
@@ -1180,7 +1180,7 @@
           <a:p>
             <a:fld id="{01AC0B91-4105-FC41-AF23-562AED5B73ED}" type="datetimeFigureOut">
               <a:rPr kumimoji="1" lang="ja-JP" altLang="en-US" smtClean="0"/>
-              <a:t>2026/1/16</a:t>
+              <a:t>2026/9/30</a:t>
             </a:fld>
             <a:endParaRPr kumimoji="1" lang="ja-JP" altLang="en-US"/>
           </a:p>
@@ -1529,7 +1529,7 @@
           <a:p>
             <a:fld id="{01AC0B91-4105-FC41-AF23-562AED5B73ED}" type="datetimeFigureOut">
               <a:rPr kumimoji="1" lang="ja-JP" altLang="en-US" smtClean="0"/>
-              <a:t>2026/1/16</a:t>
+              <a:t>2026/9/30</a:t>
             </a:fld>
             <a:endParaRPr kumimoji="1" lang="ja-JP" altLang="en-US"/>
           </a:p>
@@ -2012,7 +2012,7 @@
           <a:p>
             <a:fld id="{01AC0B91-4105-FC41-AF23-562AED5B73ED}" type="datetimeFigureOut">
               <a:rPr kumimoji="1" lang="ja-JP" altLang="en-US" smtClean="0"/>
-              <a:t>2026/1/16</a:t>
+              <a:t>2026/9/30</a:t>
             </a:fld>
             <a:endParaRPr kumimoji="1" lang="ja-JP" altLang="en-US"/>
           </a:p>
@@ -2129,7 +2129,7 @@
           <a:p>
             <a:fld id="{01AC0B91-4105-FC41-AF23-562AED5B73ED}" type="datetimeFigureOut">
               <a:rPr kumimoji="1" lang="ja-JP" altLang="en-US" smtClean="0"/>
-              <a:t>2026/1/16</a:t>
+              <a:t>2026/9/30</a:t>
             </a:fld>
             <a:endParaRPr kumimoji="1" lang="ja-JP" altLang="en-US"/>
           </a:p>
@@ -2224,7 +2224,7 @@
           <a:p>
             <a:fld id="{01AC0B91-4105-FC41-AF23-562AED5B73ED}" type="datetimeFigureOut">
               <a:rPr kumimoji="1" lang="ja-JP" altLang="en-US" smtClean="0"/>
-              <a:t>2026/1/16</a:t>
+              <a:t>2026/9/30</a:t>
             </a:fld>
             <a:endParaRPr kumimoji="1" lang="ja-JP" altLang="en-US"/>
           </a:p>
@@ -2531,7 +2531,7 @@
           <a:p>
             <a:fld id="{01AC0B91-4105-FC41-AF23-562AED5B73ED}" type="datetimeFigureOut">
               <a:rPr kumimoji="1" lang="ja-JP" altLang="en-US" smtClean="0"/>
-              <a:t>2026/1/16</a:t>
+              <a:t>2026/9/30</a:t>
             </a:fld>
             <a:endParaRPr kumimoji="1" lang="ja-JP" altLang="en-US"/>
           </a:p>
@@ -2783,7 +2783,7 @@
           <a:p>
             <a:fld id="{01AC0B91-4105-FC41-AF23-562AED5B73ED}" type="datetimeFigureOut">
               <a:rPr kumimoji="1" lang="ja-JP" altLang="en-US" smtClean="0"/>
-              <a:t>2026/1/16</a:t>
+              <a:t>2026/9/30</a:t>
             </a:fld>
             <a:endParaRPr kumimoji="1" lang="ja-JP" altLang="en-US"/>
           </a:p>
@@ -3026,7 +3026,7 @@
           <a:p>
             <a:fld id="{01AC0B91-4105-FC41-AF23-562AED5B73ED}" type="datetimeFigureOut">
               <a:rPr kumimoji="1" lang="ja-JP" altLang="en-US" smtClean="0"/>
-              <a:t>2026/1/16</a:t>
+              <a:t>2026/9/30</a:t>
             </a:fld>
             <a:endParaRPr kumimoji="1" lang="ja-JP" altLang="en-US"/>
           </a:p>
@@ -3473,56 +3473,6 @@
                 <a:schemeClr val="tx1"/>
               </a:solidFill>
             </a:endParaRPr>
-          </a:p>
-        </p:txBody>
-      </p:sp>
-      <p:sp>
-        <p:nvSpPr>
-          <p:cNvPr id="7" name="テキスト ボックス 6"/>
-          <p:cNvSpPr txBox="1"/>
-          <p:nvPr/>
-        </p:nvSpPr>
-        <p:spPr>
-          <a:xfrm>
-            <a:off x="755576" y="4365104"/>
-            <a:ext cx="7776863" cy="1077218"/>
-          </a:xfrm>
-          <a:prstGeom prst="rect">
-            <a:avLst/>
-          </a:prstGeom>
-          <a:noFill/>
-        </p:spPr>
-        <p:txBody>
-          <a:bodyPr wrap="square" rtlCol="0">
-            <a:spAutoFit/>
-          </a:bodyPr>
-          <a:lstStyle/>
-          <a:p>
-            <a:pPr algn="ctr"/>
-            <a:r>
-              <a:rPr kumimoji="1" lang="en-US" altLang="ja-JP" sz="3200" b="0" dirty="0"/>
-              <a:t>Department of </a:t>
-            </a:r>
-          </a:p>
-          <a:p>
-            <a:pPr algn="ctr"/>
-            <a:r>
-              <a:rPr lang="en-US" altLang="ja-JP" sz="3200" dirty="0"/>
-              <a:t>Computer</a:t>
-            </a:r>
-            <a:r>
-              <a:rPr kumimoji="1" lang="en-US" altLang="ja-JP" sz="3200" b="0" dirty="0"/>
-              <a:t> Science and </a:t>
-            </a:r>
-            <a:r>
-              <a:rPr lang="en-US" altLang="ja-JP" sz="3200" b="0" dirty="0"/>
-              <a:t>Engineering</a:t>
-            </a:r>
-            <a:r>
-              <a:rPr kumimoji="1" lang="en-US" altLang="ja-JP" sz="3200" b="0" dirty="0"/>
-              <a:t> </a:t>
-            </a:r>
-            <a:endParaRPr kumimoji="1" lang="ja-JP" altLang="en-US" sz="3200" b="0" dirty="0"/>
           </a:p>
         </p:txBody>
       </p:sp>
